--- a/Training Materials/16. React with Redux/Slides/2. Actions, Stores, and Reducers/actions-stores-and-reducers-slides.pptx
+++ b/Training Materials/16. React with Redux/Slides/2. Actions, Stores, and Reducers/actions-stores-and-reducers-slides.pptx
@@ -246,7 +246,7 @@
           <a:p>
             <a:fld id="{3EFD42F7-718C-4B98-AAEC-167E6DDD60A7}" type="datetimeFigureOut">
               <a:rPr lang="en-US" smtClean="0"/>
-              <a:t>12/31/2024</a:t>
+              <a:t>11/20/2025</a:t>
             </a:fld>
             <a:endParaRPr lang="en-US"/>
           </a:p>
@@ -647,7 +647,7 @@
           <a:p>
             <a:fld id="{1D8BD707-D9CF-40AE-B4C6-C98DA3205C09}" type="datetimeFigureOut">
               <a:rPr lang="en-US"/>
-              <a:t>12/31/2024</a:t>
+              <a:t>11/20/2025</a:t>
             </a:fld>
             <a:endParaRPr lang="en-US"/>
           </a:p>
@@ -820,7 +820,7 @@
           <a:p>
             <a:fld id="{1D8BD707-D9CF-40AE-B4C6-C98DA3205C09}" type="datetimeFigureOut">
               <a:rPr lang="en-US"/>
-              <a:t>12/31/2024</a:t>
+              <a:t>11/20/2025</a:t>
             </a:fld>
             <a:endParaRPr lang="en-US"/>
           </a:p>
@@ -1036,7 +1036,7 @@
           <a:p>
             <a:fld id="{1D8BD707-D9CF-40AE-B4C6-C98DA3205C09}" type="datetimeFigureOut">
               <a:rPr lang="en-US"/>
-              <a:t>12/31/2024</a:t>
+              <a:t>11/20/2025</a:t>
             </a:fld>
             <a:endParaRPr lang="en-US"/>
           </a:p>
@@ -1194,7 +1194,7 @@
           <a:p>
             <a:fld id="{1D8BD707-D9CF-40AE-B4C6-C98DA3205C09}" type="datetimeFigureOut">
               <a:rPr lang="en-US"/>
-              <a:t>12/31/2024</a:t>
+              <a:t>11/20/2025</a:t>
             </a:fld>
             <a:endParaRPr lang="en-US"/>
           </a:p>
@@ -1315,7 +1315,7 @@
           <a:p>
             <a:fld id="{1D8BD707-D9CF-40AE-B4C6-C98DA3205C09}" type="datetimeFigureOut">
               <a:rPr lang="en-US"/>
-              <a:t>12/31/2024</a:t>
+              <a:t>11/20/2025</a:t>
             </a:fld>
             <a:endParaRPr lang="en-US"/>
           </a:p>
@@ -1536,7 +1536,7 @@
           <a:p>
             <a:fld id="{1D8BD707-D9CF-40AE-B4C6-C98DA3205C09}" type="datetimeFigureOut">
               <a:rPr lang="en-US"/>
-              <a:t>12/31/2024</a:t>
+              <a:t>11/20/2025</a:t>
             </a:fld>
             <a:endParaRPr lang="en-US"/>
           </a:p>
@@ -7791,7 +7791,7 @@
         </p:blipFill>
         <p:spPr>
           <a:xfrm>
-            <a:off x="5240146" y="1952498"/>
+            <a:off x="-1788292" y="2498789"/>
             <a:ext cx="1325499" cy="365760"/>
           </a:xfrm>
           <a:prstGeom prst="rect">
@@ -7813,7 +7813,7 @@
         </p:blipFill>
         <p:spPr>
           <a:xfrm>
-            <a:off x="5240146" y="2546857"/>
+            <a:off x="-1788292" y="3093148"/>
             <a:ext cx="982065" cy="365760"/>
           </a:xfrm>
           <a:prstGeom prst="rect">
@@ -7835,7 +7835,7 @@
         </p:blipFill>
         <p:spPr>
           <a:xfrm>
-            <a:off x="5240146" y="3140913"/>
+            <a:off x="-1788292" y="3687204"/>
             <a:ext cx="2100453" cy="366064"/>
           </a:xfrm>
           <a:prstGeom prst="rect">
@@ -7857,7 +7857,7 @@
         </p:blipFill>
         <p:spPr>
           <a:xfrm>
-            <a:off x="5240146" y="3735959"/>
+            <a:off x="-1788292" y="4282250"/>
             <a:ext cx="1606803" cy="365760"/>
           </a:xfrm>
           <a:prstGeom prst="rect">
@@ -7906,7 +7906,401 @@
               <a:rPr/>
               <a:t>2</a:t>
             </a:fld>
-            <a:endParaRPr/>
+            <a:endParaRPr dirty="0"/>
+          </a:p>
+        </p:txBody>
+      </p:sp>
+      <p:sp>
+        <p:nvSpPr>
+          <p:cNvPr id="11" name="TextBox 10">
+            <a:extLst>
+              <a:ext uri="{FF2B5EF4-FFF2-40B4-BE49-F238E27FC236}">
+                <a16:creationId xmlns:a16="http://schemas.microsoft.com/office/drawing/2014/main" id="{B5D6EFA3-3B91-69B6-9CDC-306FA9D9E8B1}"/>
+              </a:ext>
+            </a:extLst>
+          </p:cNvPr>
+          <p:cNvSpPr txBox="1"/>
+          <p:nvPr/>
+        </p:nvSpPr>
+        <p:spPr>
+          <a:xfrm>
+            <a:off x="4936926" y="-76200"/>
+            <a:ext cx="6645474" cy="7478970"/>
+          </a:xfrm>
+          <a:prstGeom prst="rect">
+            <a:avLst/>
+          </a:prstGeom>
+        </p:spPr>
+        <p:txBody>
+          <a:bodyPr wrap="square">
+            <a:spAutoFit/>
+          </a:bodyPr>
+          <a:lstStyle/>
+          <a:p>
+            <a:r>
+              <a:rPr lang="en-IN" sz="2400" b="1" dirty="0">
+                <a:solidFill>
+                  <a:schemeClr val="accent6">
+                    <a:lumMod val="75000"/>
+                  </a:schemeClr>
+                </a:solidFill>
+              </a:rPr>
+              <a:t>Why Redux Toolkit?</a:t>
+            </a:r>
+          </a:p>
+          <a:p>
+            <a:pPr marL="285750" indent="-285750">
+              <a:buFont typeface="Arial" panose="020B0604020202020204" pitchFamily="34" charset="0"/>
+              <a:buChar char="•"/>
+            </a:pPr>
+            <a:r>
+              <a:rPr lang="en-IN" sz="2400" dirty="0">
+                <a:solidFill>
+                  <a:schemeClr val="accent6">
+                    <a:lumMod val="75000"/>
+                  </a:schemeClr>
+                </a:solidFill>
+              </a:rPr>
+              <a:t>Simplifies Redux setup</a:t>
+            </a:r>
+          </a:p>
+          <a:p>
+            <a:pPr marL="285750" indent="-285750">
+              <a:buFont typeface="Arial" panose="020B0604020202020204" pitchFamily="34" charset="0"/>
+              <a:buChar char="•"/>
+            </a:pPr>
+            <a:r>
+              <a:rPr lang="en-IN" sz="2400" dirty="0">
+                <a:solidFill>
+                  <a:schemeClr val="accent6">
+                    <a:lumMod val="75000"/>
+                  </a:schemeClr>
+                </a:solidFill>
+              </a:rPr>
+              <a:t>Reduces boilerplate</a:t>
+            </a:r>
+          </a:p>
+          <a:p>
+            <a:pPr marL="285750" indent="-285750">
+              <a:buFont typeface="Arial" panose="020B0604020202020204" pitchFamily="34" charset="0"/>
+              <a:buChar char="•"/>
+            </a:pPr>
+            <a:r>
+              <a:rPr lang="en-IN" sz="2400" dirty="0">
+                <a:solidFill>
+                  <a:schemeClr val="accent6">
+                    <a:lumMod val="75000"/>
+                  </a:schemeClr>
+                </a:solidFill>
+              </a:rPr>
+              <a:t>Built-in best practices</a:t>
+            </a:r>
+          </a:p>
+          <a:p>
+            <a:r>
+              <a:rPr lang="en-IN" sz="2400" b="1" dirty="0">
+                <a:solidFill>
+                  <a:schemeClr val="accent6">
+                    <a:lumMod val="75000"/>
+                  </a:schemeClr>
+                </a:solidFill>
+              </a:rPr>
+              <a:t>Core Concepts Recap</a:t>
+            </a:r>
+          </a:p>
+          <a:p>
+            <a:pPr marL="285750" indent="-285750">
+              <a:buFont typeface="Arial" panose="020B0604020202020204" pitchFamily="34" charset="0"/>
+              <a:buChar char="•"/>
+            </a:pPr>
+            <a:r>
+              <a:rPr lang="en-IN" sz="2400" dirty="0">
+                <a:solidFill>
+                  <a:schemeClr val="accent6">
+                    <a:lumMod val="75000"/>
+                  </a:schemeClr>
+                </a:solidFill>
+              </a:rPr>
+              <a:t>Actions, Store, Reducers</a:t>
+            </a:r>
+          </a:p>
+          <a:p>
+            <a:r>
+              <a:rPr lang="en-IN" sz="2400" b="1" dirty="0" err="1">
+                <a:solidFill>
+                  <a:schemeClr val="accent6">
+                    <a:lumMod val="75000"/>
+                  </a:schemeClr>
+                </a:solidFill>
+              </a:rPr>
+              <a:t>createSlice</a:t>
+            </a:r>
+            <a:endParaRPr lang="en-IN" sz="2400" b="1" dirty="0">
+              <a:solidFill>
+                <a:schemeClr val="accent6">
+                  <a:lumMod val="75000"/>
+                </a:schemeClr>
+              </a:solidFill>
+            </a:endParaRPr>
+          </a:p>
+          <a:p>
+            <a:pPr marL="285750" indent="-285750">
+              <a:buFont typeface="Arial" panose="020B0604020202020204" pitchFamily="34" charset="0"/>
+              <a:buChar char="•"/>
+            </a:pPr>
+            <a:r>
+              <a:rPr lang="en-IN" sz="2400" dirty="0">
+                <a:solidFill>
+                  <a:schemeClr val="accent6">
+                    <a:lumMod val="75000"/>
+                  </a:schemeClr>
+                </a:solidFill>
+              </a:rPr>
+              <a:t>Auto-generates actions and reducers</a:t>
+            </a:r>
+          </a:p>
+          <a:p>
+            <a:pPr marL="285750" indent="-285750">
+              <a:buFont typeface="Arial" panose="020B0604020202020204" pitchFamily="34" charset="0"/>
+              <a:buChar char="•"/>
+            </a:pPr>
+            <a:r>
+              <a:rPr lang="en-IN" sz="2400" dirty="0">
+                <a:solidFill>
+                  <a:schemeClr val="accent6">
+                    <a:lumMod val="75000"/>
+                  </a:schemeClr>
+                </a:solidFill>
+              </a:rPr>
+              <a:t>Handles immutability with Immer</a:t>
+            </a:r>
+          </a:p>
+          <a:p>
+            <a:r>
+              <a:rPr lang="en-IN" sz="2400" b="1" dirty="0" err="1">
+                <a:solidFill>
+                  <a:schemeClr val="accent6">
+                    <a:lumMod val="75000"/>
+                  </a:schemeClr>
+                </a:solidFill>
+              </a:rPr>
+              <a:t>configureStore</a:t>
+            </a:r>
+            <a:endParaRPr lang="en-IN" sz="2400" b="1" dirty="0">
+              <a:solidFill>
+                <a:schemeClr val="accent6">
+                  <a:lumMod val="75000"/>
+                </a:schemeClr>
+              </a:solidFill>
+            </a:endParaRPr>
+          </a:p>
+          <a:p>
+            <a:pPr marL="285750" indent="-285750">
+              <a:buFont typeface="Arial" panose="020B0604020202020204" pitchFamily="34" charset="0"/>
+              <a:buChar char="•"/>
+            </a:pPr>
+            <a:r>
+              <a:rPr lang="en-IN" sz="2400" dirty="0">
+                <a:solidFill>
+                  <a:schemeClr val="accent6">
+                    <a:lumMod val="75000"/>
+                  </a:schemeClr>
+                </a:solidFill>
+              </a:rPr>
+              <a:t>Simplified store setup</a:t>
+            </a:r>
+          </a:p>
+          <a:p>
+            <a:pPr marL="285750" indent="-285750">
+              <a:buFont typeface="Arial" panose="020B0604020202020204" pitchFamily="34" charset="0"/>
+              <a:buChar char="•"/>
+            </a:pPr>
+            <a:r>
+              <a:rPr lang="en-IN" sz="2400" dirty="0">
+                <a:solidFill>
+                  <a:schemeClr val="accent6">
+                    <a:lumMod val="75000"/>
+                  </a:schemeClr>
+                </a:solidFill>
+              </a:rPr>
+              <a:t>Built-in middleware and </a:t>
+            </a:r>
+            <a:r>
+              <a:rPr lang="en-IN" sz="2400" dirty="0" err="1">
+                <a:solidFill>
+                  <a:schemeClr val="accent6">
+                    <a:lumMod val="75000"/>
+                  </a:schemeClr>
+                </a:solidFill>
+              </a:rPr>
+              <a:t>DevTools</a:t>
+            </a:r>
+            <a:endParaRPr lang="en-IN" sz="2400" dirty="0">
+              <a:solidFill>
+                <a:schemeClr val="accent6">
+                  <a:lumMod val="75000"/>
+                </a:schemeClr>
+              </a:solidFill>
+            </a:endParaRPr>
+          </a:p>
+          <a:p>
+            <a:r>
+              <a:rPr lang="en-IN" sz="2400" b="1" dirty="0">
+                <a:solidFill>
+                  <a:schemeClr val="accent6">
+                    <a:lumMod val="75000"/>
+                  </a:schemeClr>
+                </a:solidFill>
+              </a:rPr>
+              <a:t>Async Logic with </a:t>
+            </a:r>
+            <a:r>
+              <a:rPr lang="en-IN" sz="2400" b="1" dirty="0" err="1">
+                <a:solidFill>
+                  <a:schemeClr val="accent6">
+                    <a:lumMod val="75000"/>
+                  </a:schemeClr>
+                </a:solidFill>
+              </a:rPr>
+              <a:t>createAsyncThunk</a:t>
+            </a:r>
+            <a:endParaRPr lang="en-IN" sz="2400" b="1" dirty="0">
+              <a:solidFill>
+                <a:schemeClr val="accent6">
+                  <a:lumMod val="75000"/>
+                </a:schemeClr>
+              </a:solidFill>
+            </a:endParaRPr>
+          </a:p>
+          <a:p>
+            <a:pPr marL="285750" indent="-285750">
+              <a:buFont typeface="Arial" panose="020B0604020202020204" pitchFamily="34" charset="0"/>
+              <a:buChar char="•"/>
+            </a:pPr>
+            <a:r>
+              <a:rPr lang="en-IN" sz="2400" dirty="0">
+                <a:solidFill>
+                  <a:schemeClr val="accent6">
+                    <a:lumMod val="75000"/>
+                  </a:schemeClr>
+                </a:solidFill>
+              </a:rPr>
+              <a:t>Handling API calls and loading states</a:t>
+            </a:r>
+          </a:p>
+          <a:p>
+            <a:r>
+              <a:rPr lang="en-IN" sz="2400" b="1" dirty="0">
+                <a:solidFill>
+                  <a:schemeClr val="accent6">
+                    <a:lumMod val="75000"/>
+                  </a:schemeClr>
+                </a:solidFill>
+              </a:rPr>
+              <a:t>React Integration</a:t>
+            </a:r>
+          </a:p>
+          <a:p>
+            <a:pPr marL="285750" indent="-285750">
+              <a:buFont typeface="Arial" panose="020B0604020202020204" pitchFamily="34" charset="0"/>
+              <a:buChar char="•"/>
+            </a:pPr>
+            <a:r>
+              <a:rPr lang="en-IN" sz="2400" dirty="0" err="1">
+                <a:solidFill>
+                  <a:schemeClr val="accent6">
+                    <a:lumMod val="75000"/>
+                  </a:schemeClr>
+                </a:solidFill>
+              </a:rPr>
+              <a:t>useSelector</a:t>
+            </a:r>
+            <a:r>
+              <a:rPr lang="en-IN" sz="2400" dirty="0">
+                <a:solidFill>
+                  <a:schemeClr val="accent6">
+                    <a:lumMod val="75000"/>
+                  </a:schemeClr>
+                </a:solidFill>
+              </a:rPr>
+              <a:t> and </a:t>
+            </a:r>
+            <a:r>
+              <a:rPr lang="en-IN" sz="2400" dirty="0" err="1">
+                <a:solidFill>
+                  <a:schemeClr val="accent6">
+                    <a:lumMod val="75000"/>
+                  </a:schemeClr>
+                </a:solidFill>
+              </a:rPr>
+              <a:t>useDispatch</a:t>
+            </a:r>
+            <a:r>
+              <a:rPr lang="en-IN" sz="2400" dirty="0">
+                <a:solidFill>
+                  <a:schemeClr val="accent6">
+                    <a:lumMod val="75000"/>
+                  </a:schemeClr>
+                </a:solidFill>
+              </a:rPr>
+              <a:t> hooks</a:t>
+            </a:r>
+          </a:p>
+          <a:p>
+            <a:r>
+              <a:rPr lang="en-IN" sz="2400" b="1" dirty="0">
+                <a:solidFill>
+                  <a:schemeClr val="accent6">
+                    <a:lumMod val="75000"/>
+                  </a:schemeClr>
+                </a:solidFill>
+              </a:rPr>
+              <a:t>RTK Query </a:t>
+            </a:r>
+          </a:p>
+          <a:p>
+            <a:pPr marL="285750" indent="-285750">
+              <a:buFont typeface="Arial" panose="020B0604020202020204" pitchFamily="34" charset="0"/>
+              <a:buChar char="•"/>
+            </a:pPr>
+            <a:r>
+              <a:rPr lang="en-IN" sz="2400" dirty="0">
+                <a:solidFill>
+                  <a:schemeClr val="accent6">
+                    <a:lumMod val="75000"/>
+                  </a:schemeClr>
+                </a:solidFill>
+              </a:rPr>
+              <a:t>Data fetching and caching</a:t>
+            </a:r>
+          </a:p>
+          <a:p>
+            <a:r>
+              <a:rPr lang="en-IN" sz="2400" b="1" dirty="0">
+                <a:solidFill>
+                  <a:schemeClr val="accent6">
+                    <a:lumMod val="75000"/>
+                  </a:schemeClr>
+                </a:solidFill>
+              </a:rPr>
+              <a:t>Summary</a:t>
+            </a:r>
+          </a:p>
+          <a:p>
+            <a:pPr marL="285750" indent="-285750">
+              <a:buFont typeface="Arial" panose="020B0604020202020204" pitchFamily="34" charset="0"/>
+              <a:buChar char="•"/>
+            </a:pPr>
+            <a:r>
+              <a:rPr lang="en-IN" sz="2400" dirty="0">
+                <a:solidFill>
+                  <a:schemeClr val="accent6">
+                    <a:lumMod val="75000"/>
+                  </a:schemeClr>
+                </a:solidFill>
+              </a:rPr>
+              <a:t>Key benefits and next steps</a:t>
+            </a:r>
           </a:p>
         </p:txBody>
       </p:sp>
